--- a/Last/LEC/05-2_TSML.pptx
+++ b/Last/LEC/05-2_TSML.pptx
@@ -246,7 +246,7 @@
           <a:p>
             <a:fld id="{803A9DE4-6CFD-4732-953B-EF950A6B3001}" type="datetimeFigureOut">
               <a:rPr lang="ru-RU" smtClean="0"/>
-              <a:t>28.04.2026</a:t>
+              <a:t>08.05.2026</a:t>
             </a:fld>
             <a:endParaRPr lang="ru-RU"/>
           </a:p>
@@ -1386,7 +1386,7 @@
           <a:p>
             <a:fld id="{43B237C4-111C-4636-B222-D785A341FF5A}" type="datetimeFigureOut">
               <a:rPr lang="ru-RU" smtClean="0"/>
-              <a:t>28.04.2026</a:t>
+              <a:t>08.05.2026</a:t>
             </a:fld>
             <a:endParaRPr lang="ru-RU"/>
           </a:p>
@@ -1554,7 +1554,7 @@
           <a:p>
             <a:fld id="{43B237C4-111C-4636-B222-D785A341FF5A}" type="datetimeFigureOut">
               <a:rPr lang="ru-RU" smtClean="0"/>
-              <a:t>28.04.2026</a:t>
+              <a:t>08.05.2026</a:t>
             </a:fld>
             <a:endParaRPr lang="ru-RU"/>
           </a:p>
@@ -1732,7 +1732,7 @@
           <a:p>
             <a:fld id="{43B237C4-111C-4636-B222-D785A341FF5A}" type="datetimeFigureOut">
               <a:rPr lang="ru-RU" smtClean="0"/>
-              <a:t>28.04.2026</a:t>
+              <a:t>08.05.2026</a:t>
             </a:fld>
             <a:endParaRPr lang="ru-RU"/>
           </a:p>
@@ -1900,7 +1900,7 @@
           <a:p>
             <a:fld id="{43B237C4-111C-4636-B222-D785A341FF5A}" type="datetimeFigureOut">
               <a:rPr lang="ru-RU" smtClean="0"/>
-              <a:t>28.04.2026</a:t>
+              <a:t>08.05.2026</a:t>
             </a:fld>
             <a:endParaRPr lang="ru-RU"/>
           </a:p>
@@ -2145,7 +2145,7 @@
           <a:p>
             <a:fld id="{43B237C4-111C-4636-B222-D785A341FF5A}" type="datetimeFigureOut">
               <a:rPr lang="ru-RU" smtClean="0"/>
-              <a:t>28.04.2026</a:t>
+              <a:t>08.05.2026</a:t>
             </a:fld>
             <a:endParaRPr lang="ru-RU"/>
           </a:p>
@@ -2374,7 +2374,7 @@
           <a:p>
             <a:fld id="{43B237C4-111C-4636-B222-D785A341FF5A}" type="datetimeFigureOut">
               <a:rPr lang="ru-RU" smtClean="0"/>
-              <a:t>28.04.2026</a:t>
+              <a:t>08.05.2026</a:t>
             </a:fld>
             <a:endParaRPr lang="ru-RU"/>
           </a:p>
@@ -2738,7 +2738,7 @@
           <a:p>
             <a:fld id="{43B237C4-111C-4636-B222-D785A341FF5A}" type="datetimeFigureOut">
               <a:rPr lang="ru-RU" smtClean="0"/>
-              <a:t>28.04.2026</a:t>
+              <a:t>08.05.2026</a:t>
             </a:fld>
             <a:endParaRPr lang="ru-RU"/>
           </a:p>
@@ -2855,7 +2855,7 @@
           <a:p>
             <a:fld id="{43B237C4-111C-4636-B222-D785A341FF5A}" type="datetimeFigureOut">
               <a:rPr lang="ru-RU" smtClean="0"/>
-              <a:t>28.04.2026</a:t>
+              <a:t>08.05.2026</a:t>
             </a:fld>
             <a:endParaRPr lang="ru-RU"/>
           </a:p>
@@ -2950,7 +2950,7 @@
           <a:p>
             <a:fld id="{43B237C4-111C-4636-B222-D785A341FF5A}" type="datetimeFigureOut">
               <a:rPr lang="ru-RU" smtClean="0"/>
-              <a:t>28.04.2026</a:t>
+              <a:t>08.05.2026</a:t>
             </a:fld>
             <a:endParaRPr lang="ru-RU"/>
           </a:p>
@@ -3225,7 +3225,7 @@
           <a:p>
             <a:fld id="{43B237C4-111C-4636-B222-D785A341FF5A}" type="datetimeFigureOut">
               <a:rPr lang="ru-RU" smtClean="0"/>
-              <a:t>28.04.2026</a:t>
+              <a:t>08.05.2026</a:t>
             </a:fld>
             <a:endParaRPr lang="ru-RU"/>
           </a:p>
@@ -3477,7 +3477,7 @@
           <a:p>
             <a:fld id="{43B237C4-111C-4636-B222-D785A341FF5A}" type="datetimeFigureOut">
               <a:rPr lang="ru-RU" smtClean="0"/>
-              <a:t>28.04.2026</a:t>
+              <a:t>08.05.2026</a:t>
             </a:fld>
             <a:endParaRPr lang="ru-RU"/>
           </a:p>
@@ -3688,7 +3688,7 @@
           <a:p>
             <a:fld id="{43B237C4-111C-4636-B222-D785A341FF5A}" type="datetimeFigureOut">
               <a:rPr lang="ru-RU" smtClean="0"/>
-              <a:t>28.04.2026</a:t>
+              <a:t>08.05.2026</a:t>
             </a:fld>
             <a:endParaRPr lang="ru-RU"/>
           </a:p>
@@ -4144,13 +4144,6 @@
   <p:clrMapOvr>
     <a:masterClrMapping/>
   </p:clrMapOvr>
-  <p:timing>
-    <p:tnLst>
-      <p:par>
-        <p:cTn id="1" dur="indefinite" restart="never" nodeType="tmRoot"/>
-      </p:par>
-    </p:tnLst>
-  </p:timing>
 </p:sld>
 </file>
 
@@ -4620,13 +4613,6 @@
   <p:clrMapOvr>
     <a:masterClrMapping/>
   </p:clrMapOvr>
-  <p:timing>
-    <p:tnLst>
-      <p:par>
-        <p:cTn id="1" dur="indefinite" restart="never" nodeType="tmRoot"/>
-      </p:par>
-    </p:tnLst>
-  </p:timing>
 </p:sld>
 </file>
 
@@ -4820,13 +4806,6 @@
   <p:clrMapOvr>
     <a:masterClrMapping/>
   </p:clrMapOvr>
-  <p:timing>
-    <p:tnLst>
-      <p:par>
-        <p:cTn id="1" dur="indefinite" restart="never" nodeType="tmRoot"/>
-      </p:par>
-    </p:tnLst>
-  </p:timing>
 </p:sld>
 </file>
 
@@ -5199,13 +5178,6 @@
   <p:clrMapOvr>
     <a:masterClrMapping/>
   </p:clrMapOvr>
-  <p:timing>
-    <p:tnLst>
-      <p:par>
-        <p:cTn id="1" dur="indefinite" restart="never" nodeType="tmRoot"/>
-      </p:par>
-    </p:tnLst>
-  </p:timing>
 </p:sld>
 </file>
 
@@ -5349,12 +5321,8 @@
                     <a:p>
                       <a:pPr algn="ctr"/>
                       <a:r>
-                        <a:rPr lang="ru-RU" dirty="0" smtClean="0"/>
-                        <a:t>Предсказания </a:t>
-                      </a:r>
-                      <a:r>
                         <a:rPr lang="ru-RU" dirty="0"/>
-                        <a:t>ВР</a:t>
+                        <a:t>Предсказания ВР</a:t>
                       </a:r>
                     </a:p>
                   </a:txBody>
@@ -5825,37 +5793,37 @@
               </a:spcAft>
             </a:pPr>
             <a:r>
-              <a:rPr lang="ru-RU" altLang="ru-RU" b="1" dirty="0" smtClean="0">
+              <a:rPr lang="ru-RU" altLang="ru-RU" b="1" dirty="0">
                 <a:latin typeface="system-ui"/>
               </a:rPr>
               <a:t>Даже если прогноз </a:t>
             </a:r>
             <a:r>
-              <a:rPr lang="ru-RU" altLang="ru-RU" dirty="0" smtClean="0">
+              <a:rPr lang="ru-RU" altLang="ru-RU" dirty="0">
                 <a:latin typeface="system-ui"/>
               </a:rPr>
               <a:t>преобразован в регрессию, </a:t>
             </a:r>
             <a:r>
-              <a:rPr lang="ru-RU" altLang="ru-RU" dirty="0" err="1" smtClean="0">
+              <a:rPr lang="ru-RU" altLang="ru-RU" dirty="0" err="1">
                 <a:latin typeface="system-ui"/>
               </a:rPr>
               <a:t>валидация</a:t>
             </a:r>
             <a:r>
-              <a:rPr lang="ru-RU" altLang="ru-RU" dirty="0" smtClean="0">
+              <a:rPr lang="ru-RU" altLang="ru-RU" dirty="0">
                 <a:latin typeface="system-ui"/>
               </a:rPr>
               <a:t> и тест не перемешивают с </a:t>
             </a:r>
             <a:r>
-              <a:rPr lang="ru-RU" altLang="ru-RU" dirty="0" err="1" smtClean="0">
+              <a:rPr lang="ru-RU" altLang="ru-RU" dirty="0" err="1">
                 <a:latin typeface="system-ui"/>
               </a:rPr>
               <a:t>трейном</a:t>
             </a:r>
             <a:r>
-              <a:rPr lang="ru-RU" altLang="ru-RU" dirty="0" smtClean="0">
+              <a:rPr lang="ru-RU" altLang="ru-RU" dirty="0">
                 <a:latin typeface="system-ui"/>
               </a:rPr>
               <a:t> (последовательность сохраняется!). </a:t>
@@ -5871,14 +5839,11 @@
               </a:spcAft>
             </a:pPr>
             <a:r>
-              <a:rPr lang="ru-RU" altLang="ru-RU" dirty="0" smtClean="0">
+              <a:rPr lang="ru-RU" altLang="ru-RU" dirty="0">
                 <a:latin typeface="system-ui"/>
               </a:rPr>
               <a:t>Лучше делать операции редукции после разделения выборок!</a:t>
             </a:r>
-            <a:endParaRPr lang="ru-RU" altLang="ru-RU" dirty="0">
-              <a:latin typeface="system-ui"/>
-            </a:endParaRPr>
           </a:p>
         </p:txBody>
       </p:sp>
@@ -5892,13 +5857,6 @@
   <p:clrMapOvr>
     <a:masterClrMapping/>
   </p:clrMapOvr>
-  <p:timing>
-    <p:tnLst>
-      <p:par>
-        <p:cTn id="1" dur="indefinite" restart="never" nodeType="tmRoot"/>
-      </p:par>
-    </p:tnLst>
-  </p:timing>
 </p:sld>
 </file>
 
@@ -6130,13 +6088,6 @@
   <p:clrMapOvr>
     <a:masterClrMapping/>
   </p:clrMapOvr>
-  <p:timing>
-    <p:tnLst>
-      <p:par>
-        <p:cTn id="1" dur="indefinite" restart="never" nodeType="tmRoot"/>
-      </p:par>
-    </p:tnLst>
-  </p:timing>
 </p:sld>
 </file>
 
@@ -6285,7 +6236,6 @@
               <a:rPr lang="ru-RU" altLang="ru-RU" sz="2300" dirty="0"/>
               <a:t> – то есть утечке информации (или появление ложных зависимостей). </a:t>
             </a:r>
-            <a:endParaRPr lang="ru-RU" altLang="ru-RU" sz="2300" dirty="0" smtClean="0"/>
           </a:p>
           <a:p>
             <a:pPr marL="0" indent="0" eaLnBrk="0" fontAlgn="base" hangingPunct="0">
@@ -6481,15 +6431,7 @@
             </a:pPr>
             <a:r>
               <a:rPr lang="ru-RU" altLang="ru-RU" sz="2300" dirty="0"/>
-              <a:t>При добавлении признаков в окно прогноза нужно смотреть чтобы </a:t>
-            </a:r>
-            <a:r>
-              <a:rPr lang="ru-RU" altLang="ru-RU" sz="2300" dirty="0" smtClean="0"/>
-              <a:t>не было </a:t>
-            </a:r>
-            <a:r>
-              <a:rPr lang="ru-RU" altLang="ru-RU" sz="2300" dirty="0"/>
-              <a:t>утечки данных – признаки не должны опережать временную метку предсказываемого значения.</a:t>
+              <a:t>При добавлении признаков в окно прогноза нужно смотреть чтобы не было утечки данных – признаки не должны опережать временную метку предсказываемого значения.</a:t>
             </a:r>
           </a:p>
           <a:p>
@@ -6582,13 +6524,6 @@
   <p:clrMapOvr>
     <a:masterClrMapping/>
   </p:clrMapOvr>
-  <p:timing>
-    <p:tnLst>
-      <p:par>
-        <p:cTn id="1" dur="indefinite" restart="never" nodeType="tmRoot"/>
-      </p:par>
-    </p:tnLst>
-  </p:timing>
 </p:sld>
 </file>
 
@@ -6943,13 +6878,6 @@
   <p:clrMapOvr>
     <a:masterClrMapping/>
   </p:clrMapOvr>
-  <p:timing>
-    <p:tnLst>
-      <p:par>
-        <p:cTn id="1" dur="indefinite" restart="never" nodeType="tmRoot"/>
-      </p:par>
-    </p:tnLst>
-  </p:timing>
 </p:sld>
 </file>
 
@@ -7091,12 +7019,8 @@
               </a:spcAft>
             </a:pPr>
             <a:r>
-              <a:rPr lang="ru-RU" altLang="ru-RU" dirty="0" smtClean="0"/>
-              <a:t>Несут </a:t>
-            </a:r>
-            <a:r>
               <a:rPr lang="ru-RU" altLang="ru-RU" dirty="0"/>
-              <a:t>неизменную во времени информацию для каждого временного ряда.</a:t>
+              <a:t>Несут неизменную во времени информацию для каждого временного ряда.</a:t>
             </a:r>
             <a:endParaRPr lang="en-US" altLang="ru-RU" dirty="0"/>
           </a:p>
@@ -7118,11 +7042,7 @@
             </a:r>
             <a:r>
               <a:rPr lang="ru-RU" altLang="ru-RU" sz="2400" dirty="0"/>
-              <a:t> идентификаторы регионов, групп товаров и т. д</a:t>
-            </a:r>
-            <a:r>
-              <a:rPr lang="ru-RU" altLang="ru-RU" sz="2400" dirty="0" smtClean="0"/>
-              <a:t>.</a:t>
+              <a:t> идентификаторы регионов, групп товаров и т. д.</a:t>
             </a:r>
           </a:p>
           <a:p>
@@ -7182,11 +7102,7 @@
             </a:r>
             <a:r>
               <a:rPr lang="ru-RU" altLang="ru-RU" sz="2600" dirty="0"/>
-              <a:t> на казуальность</a:t>
-            </a:r>
-            <a:r>
-              <a:rPr lang="ru-RU" altLang="ru-RU" sz="2600" dirty="0" smtClean="0"/>
-              <a:t>.</a:t>
+              <a:t> на казуальность.</a:t>
             </a:r>
           </a:p>
           <a:p>
@@ -7238,11 +7154,7 @@
             </a:pPr>
             <a:r>
               <a:rPr lang="ru-RU" altLang="ru-RU" dirty="0"/>
-              <a:t>Напр. календарные переменные, известные события, (напр. запланированные акции</a:t>
-            </a:r>
-            <a:r>
-              <a:rPr lang="ru-RU" altLang="ru-RU" dirty="0" smtClean="0"/>
-              <a:t>),</a:t>
+              <a:t>Напр. календарные переменные, известные события, (напр. запланированные акции),</a:t>
             </a:r>
           </a:p>
           <a:p>
@@ -7258,12 +7170,8 @@
               </a:spcAft>
             </a:pPr>
             <a:r>
-              <a:rPr lang="ru-RU" altLang="ru-RU" dirty="0" smtClean="0"/>
-              <a:t>Прогнозы </a:t>
-            </a:r>
-            <a:r>
               <a:rPr lang="ru-RU" altLang="ru-RU" dirty="0"/>
-              <a:t>факторов (напр. прогноз погоды для прогноза электропотребления на 1 день).</a:t>
+              <a:t>Прогнозы факторов (напр. прогноз погоды для прогноза электропотребления на 1 день).</a:t>
             </a:r>
             <a:endParaRPr lang="en-US" altLang="ru-RU" dirty="0"/>
           </a:p>
@@ -7396,13 +7304,6 @@
   <p:clrMapOvr>
     <a:masterClrMapping/>
   </p:clrMapOvr>
-  <p:timing>
-    <p:tnLst>
-      <p:par>
-        <p:cTn id="1" dur="indefinite" restart="never" nodeType="tmRoot"/>
-      </p:par>
-    </p:tnLst>
-  </p:timing>
 </p:sld>
 </file>
 
@@ -7447,7 +7348,7 @@
           <a:p>
             <a:pPr lvl="0"/>
             <a:r>
-              <a:rPr lang="ru-RU" altLang="ru-RU" b="1" dirty="0" smtClean="0">
+              <a:rPr lang="ru-RU" altLang="ru-RU" b="1" dirty="0">
                 <a:solidFill>
                   <a:srgbClr val="0D47A1"/>
                 </a:solidFill>
@@ -7456,7 +7357,7 @@
               <a:t>Многомерные ВР</a:t>
             </a:r>
             <a:r>
-              <a:rPr lang="ru-RU" altLang="ru-RU" dirty="0" smtClean="0"/>
+              <a:rPr lang="ru-RU" altLang="ru-RU" dirty="0"/>
               <a:t>:</a:t>
             </a:r>
             <a:r>
@@ -7665,10 +7566,9 @@
           <a:lstStyle/>
           <a:p>
             <a:r>
-              <a:rPr lang="ru-RU" dirty="0" smtClean="0"/>
+              <a:rPr lang="ru-RU" dirty="0"/>
               <a:t>Независимые ВР</a:t>
             </a:r>
-            <a:endParaRPr lang="ru-RU" dirty="0"/>
           </a:p>
         </p:txBody>
       </p:sp>
@@ -7695,10 +7595,9 @@
           <a:lstStyle/>
           <a:p>
             <a:r>
-              <a:rPr lang="ru-RU" dirty="0" smtClean="0"/>
+              <a:rPr lang="ru-RU" dirty="0"/>
               <a:t>Связанные ВР</a:t>
             </a:r>
-            <a:endParaRPr lang="ru-RU" dirty="0"/>
           </a:p>
         </p:txBody>
       </p:sp>
@@ -7712,13 +7611,6 @@
   <p:clrMapOvr>
     <a:masterClrMapping/>
   </p:clrMapOvr>
-  <p:timing>
-    <p:tnLst>
-      <p:par>
-        <p:cTn id="1" dur="indefinite" restart="never" nodeType="tmRoot"/>
-      </p:par>
-    </p:tnLst>
-  </p:timing>
 </p:sld>
 </file>
 
@@ -8024,13 +7916,6 @@
   <p:clrMapOvr>
     <a:masterClrMapping/>
   </p:clrMapOvr>
-  <p:timing>
-    <p:tnLst>
-      <p:par>
-        <p:cTn id="1" dur="indefinite" restart="never" nodeType="tmRoot"/>
-      </p:par>
-    </p:tnLst>
-  </p:timing>
 </p:sld>
 </file>
 
@@ -8096,7 +7981,7 @@
         </p:nvGraphicFramePr>
         <p:xfrm>
           <a:off x="228598" y="1401333"/>
-          <a:ext cx="11671666" cy="4576737"/>
+          <a:ext cx="11671666" cy="4494442"/>
         </p:xfrm>
         <a:graphic>
           <a:graphicData uri="http://schemas.openxmlformats.org/drawingml/2006/table">
@@ -10512,13 +10397,6 @@
   <p:clrMapOvr>
     <a:masterClrMapping/>
   </p:clrMapOvr>
-  <p:timing>
-    <p:tnLst>
-      <p:par>
-        <p:cTn id="1" dur="indefinite" restart="never" nodeType="tmRoot"/>
-      </p:par>
-    </p:tnLst>
-  </p:timing>
 </p:sld>
 </file>
 
@@ -11171,13 +11049,6 @@
   <p:clrMapOvr>
     <a:masterClrMapping/>
   </p:clrMapOvr>
-  <p:timing>
-    <p:tnLst>
-      <p:par>
-        <p:cTn id="1" dur="indefinite" restart="never" nodeType="tmRoot"/>
-      </p:par>
-    </p:tnLst>
-  </p:timing>
 </p:sld>
 </file>
 
@@ -11869,13 +11740,6 @@
   <p:clrMapOvr>
     <a:masterClrMapping/>
   </p:clrMapOvr>
-  <p:timing>
-    <p:tnLst>
-      <p:par>
-        <p:cTn id="1" dur="indefinite" restart="never" nodeType="tmRoot"/>
-      </p:par>
-    </p:tnLst>
-  </p:timing>
 </p:sld>
 </file>
 
@@ -13594,13 +13458,6 @@
   <p:clrMapOvr>
     <a:masterClrMapping/>
   </p:clrMapOvr>
-  <p:timing>
-    <p:tnLst>
-      <p:par>
-        <p:cTn id="1" dur="indefinite" restart="never" nodeType="tmRoot"/>
-      </p:par>
-    </p:tnLst>
-  </p:timing>
 </p:sld>
 </file>
 
@@ -13643,10 +13500,9 @@
           <a:p>
             <a:pPr algn="ctr"/>
             <a:r>
-              <a:rPr lang="ru-RU" dirty="0" smtClean="0"/>
+              <a:rPr lang="ru-RU" dirty="0"/>
               <a:t>Вопросы для самоконтроля</a:t>
             </a:r>
-            <a:endParaRPr lang="ru-RU" dirty="0"/>
           </a:p>
         </p:txBody>
       </p:sp>
@@ -13673,55 +13529,39 @@
             <a:pPr lvl="0" algn="just"/>
             <a:r>
               <a:rPr lang="ru-RU" sz="2400" dirty="0"/>
-              <a:t>Назовите основные отличия использования методов классического машинного обучения от статистических методов. Какие основные подходы к применению методом машинного обучения есть и когда их стоит использовать. Приведите примеры задач где необходимо использовать методы машинного обучения</a:t>
-            </a:r>
-            <a:r>
-              <a:rPr lang="ru-RU" sz="2400" dirty="0" smtClean="0"/>
-              <a:t>.</a:t>
+              <a:t>Назовите основные отличия использования методов классического машинного обучения от статистических методов. Какие основные подходы к применению методом машинного обучения есть и когда их стоит использовать. Приведите примеры задач где необходимо использовать методы машинного обучения.</a:t>
             </a:r>
           </a:p>
           <a:p>
             <a:pPr lvl="0" algn="just"/>
             <a:r>
               <a:rPr lang="ru-RU" sz="2400" dirty="0"/>
-              <a:t>Приведите примеры экзогенных факторов в различных </a:t>
-            </a:r>
-            <a:r>
-              <a:rPr lang="ru-RU" sz="2400" dirty="0" smtClean="0"/>
-              <a:t>задачах. Объясните </a:t>
-            </a:r>
+              <a:t>Приведите примеры экзогенных факторов в различных задачах. Объясните как их использовать экзогенные факторы в моделях машинного обучения, как отбирать эти факторы. </a:t>
+            </a:r>
+          </a:p>
+          <a:p>
+            <a:pPr lvl="0" algn="just"/>
             <a:r>
               <a:rPr lang="ru-RU" sz="2400" dirty="0"/>
-              <a:t>как их использовать </a:t>
-            </a:r>
-            <a:r>
-              <a:rPr lang="ru-RU" sz="2400" dirty="0" smtClean="0"/>
-              <a:t>экзогенные факторы в моделях машинного обучения, как отбирать эти факторы. </a:t>
+              <a:t>Выберите задачу анализа ВР. Распишите </a:t>
+            </a:r>
+            <a:r>
+              <a:rPr lang="ru-RU" sz="2400" dirty="0" err="1"/>
+              <a:t>пайплайн</a:t>
+            </a:r>
+            <a:r>
+              <a:rPr lang="ru-RU" sz="2400" dirty="0"/>
+              <a:t> решения задачи анализа ВР при помощи МО. Обоснуйте свой выбор. Укажите какие тут могут быть проблемы анализа остатков ВР. Предложите методы диагностики.</a:t>
             </a:r>
           </a:p>
           <a:p>
             <a:pPr lvl="0" algn="just"/>
             <a:r>
-              <a:rPr lang="ru-RU" sz="2400" dirty="0" smtClean="0"/>
-              <a:t>Выберите задачу анализа ВР. Распишите </a:t>
-            </a:r>
-            <a:r>
-              <a:rPr lang="ru-RU" sz="2400" dirty="0" err="1" smtClean="0"/>
-              <a:t>пайплайн</a:t>
-            </a:r>
-            <a:r>
-              <a:rPr lang="ru-RU" sz="2400" dirty="0" smtClean="0"/>
-              <a:t> решения задачи анализа ВР при помощи МО. Обоснуйте свой выбор. Укажите какие тут могут быть проблемы анализа остатков ВР. Предложите методы диагностики.</a:t>
-            </a:r>
-          </a:p>
-          <a:p>
-            <a:pPr lvl="0" algn="just"/>
-            <a:r>
-              <a:rPr lang="ru-RU" sz="2400" dirty="0" smtClean="0"/>
+              <a:rPr lang="ru-RU" sz="2400" dirty="0"/>
               <a:t>Предположите какие особенности задачи регрессии ВР и ее решения могут быть анализируя задачу предсказаний. Приведите примеры задач, подходящих для </a:t>
             </a:r>
             <a:r>
-              <a:rPr lang="ru-RU" sz="2400" smtClean="0"/>
+              <a:rPr lang="ru-RU" sz="2400"/>
               <a:t>указанного подхода.</a:t>
             </a:r>
             <a:endParaRPr lang="ru-RU" sz="2400" dirty="0"/>
@@ -13741,13 +13581,6 @@
   <p:clrMapOvr>
     <a:masterClrMapping/>
   </p:clrMapOvr>
-  <p:timing>
-    <p:tnLst>
-      <p:par>
-        <p:cTn id="1" dur="indefinite" restart="never" nodeType="tmRoot"/>
-      </p:par>
-    </p:tnLst>
-  </p:timing>
 </p:sld>
 </file>
 
@@ -13924,21 +13757,6 @@
   <p:clrMapOvr>
     <a:masterClrMapping/>
   </p:clrMapOvr>
-  <mc:AlternateContent xmlns:mc="http://schemas.openxmlformats.org/markup-compatibility/2006" xmlns:p14="http://schemas.microsoft.com/office/powerpoint/2010/main">
-    <mc:Choice Requires="p14">
-      <p:transition spd="slow" p14:dur="2000"/>
-    </mc:Choice>
-    <mc:Fallback xmlns="">
-      <p:transition spd="slow"/>
-    </mc:Fallback>
-  </mc:AlternateContent>
-  <p:timing>
-    <p:tnLst>
-      <p:par>
-        <p:cTn id="1" dur="indefinite" restart="never" nodeType="tmRoot"/>
-      </p:par>
-    </p:tnLst>
-  </p:timing>
 </p:sld>
 </file>
 
@@ -14316,13 +14134,6 @@
   <p:clrMapOvr>
     <a:masterClrMapping/>
   </p:clrMapOvr>
-  <p:timing>
-    <p:tnLst>
-      <p:par>
-        <p:cTn id="1" dur="indefinite" restart="never" nodeType="tmRoot"/>
-      </p:par>
-    </p:tnLst>
-  </p:timing>
 </p:sld>
 </file>
 
@@ -14736,7 +14547,7 @@
               <a:t>Theorem</a:t>
             </a:r>
             <a:r>
-              <a:rPr lang="ru-RU" dirty="0" smtClean="0">
+              <a:rPr lang="ru-RU" dirty="0">
                 <a:solidFill>
                   <a:srgbClr val="000000"/>
                 </a:solidFill>
@@ -14745,36 +14556,18 @@
               <a:t>)-</a:t>
             </a:r>
             <a:r>
-              <a:rPr lang="ru-RU" dirty="0" smtClean="0">
-                <a:solidFill>
-                  <a:srgbClr val="0D0D0D"/>
-                </a:solidFill>
-                <a:latin typeface="ui-sans-serif"/>
-              </a:rPr>
-              <a:t>динамическая </a:t>
-            </a:r>
-            <a:r>
               <a:rPr lang="ru-RU" dirty="0">
                 <a:solidFill>
                   <a:srgbClr val="0D0D0D"/>
                 </a:solidFill>
                 <a:latin typeface="ui-sans-serif"/>
               </a:rPr>
-              <a:t>система может быть восстановлена по задержкам (лагам) одной переменной</a:t>
-            </a:r>
-            <a:r>
-              <a:rPr lang="ru-RU" dirty="0" smtClean="0">
-                <a:solidFill>
-                  <a:srgbClr val="0D0D0D"/>
-                </a:solidFill>
-                <a:latin typeface="ui-sans-serif"/>
-              </a:rPr>
-              <a:t>.</a:t>
-            </a:r>
-          </a:p>
-          <a:p>
-            <a:r>
-              <a:rPr lang="ru-RU" dirty="0" smtClean="0">
+              <a:t>динамическая система может быть восстановлена по задержкам (лагам) одной переменной.</a:t>
+            </a:r>
+          </a:p>
+          <a:p>
+            <a:r>
+              <a:rPr lang="ru-RU" dirty="0">
                 <a:solidFill>
                   <a:srgbClr val="0D0D0D"/>
                 </a:solidFill>
@@ -14796,13 +14589,6 @@
   <p:clrMapOvr>
     <a:masterClrMapping/>
   </p:clrMapOvr>
-  <p:timing>
-    <p:tnLst>
-      <p:par>
-        <p:cTn id="1" dur="indefinite" restart="never" nodeType="tmRoot"/>
-      </p:par>
-    </p:tnLst>
-  </p:timing>
 </p:sld>
 </file>
 
@@ -14879,13 +14665,13 @@
               <a:buNone/>
             </a:pPr>
             <a:r>
-              <a:rPr lang="ru-RU" sz="2400" dirty="0" smtClean="0"/>
+              <a:rPr lang="ru-RU" sz="2400" dirty="0"/>
               <a:t>Выделение признаков из временного ряда  в таблицу</a:t>
             </a:r>
           </a:p>
           <a:p>
             <a:r>
-              <a:rPr lang="ru-RU" sz="2400" dirty="0" smtClean="0"/>
+              <a:rPr lang="ru-RU" sz="2400" dirty="0"/>
               <a:t>Лучше работает не для задач предсказания (для остальных задач)</a:t>
             </a:r>
           </a:p>
@@ -15068,10 +14854,9 @@
           <a:lstStyle/>
           <a:p>
             <a:r>
-              <a:rPr lang="ru-RU" dirty="0" smtClean="0"/>
+              <a:rPr lang="ru-RU" dirty="0"/>
               <a:t>Могут быть и гибриды – и признаки и участки сырого ряда</a:t>
             </a:r>
-            <a:endParaRPr lang="ru-RU" dirty="0"/>
           </a:p>
         </p:txBody>
       </p:sp>
@@ -15085,13 +14870,6 @@
   <p:clrMapOvr>
     <a:masterClrMapping/>
   </p:clrMapOvr>
-  <p:timing>
-    <p:tnLst>
-      <p:par>
-        <p:cTn id="1" dur="indefinite" restart="never" nodeType="tmRoot"/>
-      </p:par>
-    </p:tnLst>
-  </p:timing>
 </p:sld>
 </file>
 
@@ -15297,36 +15075,32 @@
             </a:r>
             <a:r>
               <a:rPr lang="en" sz="2000" dirty="0"/>
-              <a:t>​</a:t>
-            </a:r>
-            <a:r>
-              <a:rPr lang="en" sz="2000" dirty="0" smtClean="0"/>
-              <a:t>).</a:t>
-            </a:r>
-          </a:p>
-          <a:p>
-            <a:r>
-              <a:rPr lang="ru-RU" sz="2000" dirty="0" smtClean="0"/>
+              <a:t>​).</a:t>
+            </a:r>
+          </a:p>
+          <a:p>
+            <a:r>
+              <a:rPr lang="ru-RU" sz="2000" dirty="0"/>
               <a:t>Желательно, чтобы окон </a:t>
             </a:r>
             <a:r>
-              <a:rPr lang="en-US" sz="2000" dirty="0" smtClean="0"/>
+              <a:rPr lang="en-US" sz="2000" dirty="0"/>
               <a:t>&gt; </a:t>
             </a:r>
             <a:r>
-              <a:rPr lang="ru-RU" sz="2000" dirty="0" smtClean="0"/>
+              <a:rPr lang="ru-RU" sz="2000" dirty="0"/>
               <a:t>числа значимых лагов </a:t>
             </a:r>
             <a:r>
-              <a:rPr lang="en-US" sz="2000" dirty="0" smtClean="0"/>
+              <a:rPr lang="en-US" sz="2000" dirty="0"/>
               <a:t>ACF </a:t>
             </a:r>
             <a:r>
-              <a:rPr lang="ru-RU" sz="2000" dirty="0" smtClean="0"/>
+              <a:rPr lang="ru-RU" sz="2000" dirty="0"/>
               <a:t>или </a:t>
             </a:r>
             <a:r>
-              <a:rPr lang="en-US" sz="2000" dirty="0" smtClean="0"/>
+              <a:rPr lang="en-US" sz="2000" dirty="0"/>
               <a:t>~ season</a:t>
             </a:r>
             <a:endParaRPr lang="en" sz="2000" dirty="0"/>
@@ -15550,13 +15324,6 @@
   <p:clrMapOvr>
     <a:masterClrMapping/>
   </p:clrMapOvr>
-  <p:timing>
-    <p:tnLst>
-      <p:par>
-        <p:cTn id="1" dur="indefinite" restart="never" nodeType="tmRoot"/>
-      </p:par>
-    </p:tnLst>
-  </p:timing>
 </p:sld>
 </file>
 
@@ -15712,15 +15479,7 @@
             </a:r>
             <a:r>
               <a:rPr lang="ru-RU" sz="2000" dirty="0"/>
-              <a:t> – </a:t>
-            </a:r>
-            <a:r>
-              <a:rPr lang="ru-RU" sz="2000" dirty="0" smtClean="0"/>
-              <a:t>значение</a:t>
-            </a:r>
-            <a:r>
-              <a:rPr lang="ru-RU" sz="2000" dirty="0"/>
-              <a:t> </a:t>
+              <a:t> – значение </a:t>
             </a:r>
             <a:r>
               <a:rPr lang="en" sz="2000" i="1" dirty="0"/>
@@ -15728,11 +15487,7 @@
             </a:r>
             <a:r>
               <a:rPr lang="en" sz="2000" dirty="0"/>
-              <a:t>​</a:t>
-            </a:r>
-            <a:r>
-              <a:rPr lang="en" sz="2000" dirty="0" smtClean="0"/>
-              <a:t>.</a:t>
+              <a:t>​.</a:t>
             </a:r>
           </a:p>
           <a:p>
@@ -15742,7 +15497,7 @@
               </a:spcBef>
             </a:pPr>
             <a:r>
-              <a:rPr lang="ru-RU" sz="2000" dirty="0" smtClean="0"/>
+              <a:rPr lang="ru-RU" sz="2000" dirty="0"/>
               <a:t>Число моделей из технологических соображений, </a:t>
             </a:r>
           </a:p>
@@ -15753,15 +15508,15 @@
               </a:spcBef>
             </a:pPr>
             <a:r>
-              <a:rPr lang="ru-RU" sz="2000" dirty="0" smtClean="0"/>
+              <a:rPr lang="ru-RU" sz="2000" dirty="0"/>
               <a:t>Лучше, если </a:t>
             </a:r>
             <a:r>
-              <a:rPr lang="ru-RU" sz="2000" dirty="0" err="1" smtClean="0"/>
+              <a:rPr lang="ru-RU" sz="2000" dirty="0" err="1"/>
               <a:t>трагет</a:t>
             </a:r>
             <a:r>
-              <a:rPr lang="ru-RU" sz="2000" dirty="0" smtClean="0"/>
+              <a:rPr lang="ru-RU" sz="2000" dirty="0"/>
               <a:t> предсказать сложно</a:t>
             </a:r>
             <a:endParaRPr lang="en" sz="2000" dirty="0"/>
@@ -15982,13 +15737,6 @@
   <p:clrMapOvr>
     <a:masterClrMapping/>
   </p:clrMapOvr>
-  <p:timing>
-    <p:tnLst>
-      <p:par>
-        <p:cTn id="1" dur="indefinite" restart="never" nodeType="tmRoot"/>
-      </p:par>
-    </p:tnLst>
-  </p:timing>
 </p:sld>
 </file>
 
@@ -16152,10 +15900,6 @@
             </a:r>
           </a:p>
           <a:p>
-            <a:r>
-              <a:rPr lang="en" dirty="0"/>
-              <a:t/>
-            </a:r>
             <a:br>
               <a:rPr lang="en" dirty="0"/>
             </a:br>
@@ -16330,13 +16074,6 @@
   <p:clrMapOvr>
     <a:masterClrMapping/>
   </p:clrMapOvr>
-  <p:timing>
-    <p:tnLst>
-      <p:par>
-        <p:cTn id="1" dur="indefinite" restart="never" nodeType="tmRoot"/>
-      </p:par>
-    </p:tnLst>
-  </p:timing>
 </p:sld>
 </file>
 
@@ -16672,13 +16409,6 @@
   <p:clrMapOvr>
     <a:masterClrMapping/>
   </p:clrMapOvr>
-  <p:timing>
-    <p:tnLst>
-      <p:par>
-        <p:cTn id="1" dur="indefinite" restart="never" nodeType="tmRoot"/>
-      </p:par>
-    </p:tnLst>
-  </p:timing>
 </p:sld>
 </file>
 
